--- a/reports/PowerBI/HeMAB_QA_Dashboard_Latest.pptx
+++ b/reports/PowerBI/HeMAB_QA_Dashboard_Latest.pptx
@@ -149,7 +149,7 @@
           <a:p xmlns:a="http://schemas.openxmlformats.org/drawingml/2006/main">
             <a:r>
               <a:rPr b="1" dirty="0"/>
-              <a:t>HH Members Interviewed By FW</a:t>
+              <a:t>HH Members Interviewed By FW as of Today</a:t>
             </a:r>
             <a:endParaRPr dirty="0"/>
           </a:p>
@@ -254,91 +254,7 @@
           <a:p xmlns:a="http://schemas.openxmlformats.org/drawingml/2006/main">
             <a:r>
               <a:rPr b="1" dirty="0"/>
-              <a:t>(HH Member Tool) Type of respondent interviewed by field worker</a:t>
-            </a:r>
-            <a:endParaRPr dirty="0"/>
-          </a:p>
-          <a:p xmlns:a="http://schemas.openxmlformats.org/drawingml/2006/main">
-            <a:r>
-              <a:rPr b="0" dirty="0"/>
-              <a:t>No alt text provided</a:t>
-            </a:r>
-            <a:endParaRPr dirty="0"/>
-          </a:p>
-          <a:p xmlns:a="http://schemas.openxmlformats.org/drawingml/2006/main">
-            <a:r>
-              <a:rPr b="0" dirty="0"/>
-              <a:t/>
-            </a:r>
-            <a:endParaRPr dirty="0"/>
-          </a:p>
-          <a:p xmlns:a="http://schemas.openxmlformats.org/drawingml/2006/main">
-            <a:r>
-              <a:rPr b="1" dirty="0"/>
-              <a:t>HH members errors comitted by FW and Tool Section</a:t>
-            </a:r>
-            <a:endParaRPr dirty="0"/>
-          </a:p>
-          <a:p xmlns:a="http://schemas.openxmlformats.org/drawingml/2006/main">
-            <a:r>
-              <a:rPr b="0" dirty="0"/>
-              <a:t>No alt text provided</a:t>
-            </a:r>
-            <a:endParaRPr dirty="0"/>
-          </a:p>
-          <a:p xmlns:a="http://schemas.openxmlformats.org/drawingml/2006/main">
-            <a:r>
-              <a:rPr b="0" dirty="0"/>
-              <a:t/>
-            </a:r>
-            <a:endParaRPr dirty="0"/>
-          </a:p>
-          <a:p xmlns:a="http://schemas.openxmlformats.org/drawingml/2006/main">
-            <a:r>
-              <a:rPr b="1" dirty="0"/>
-              <a:t>(Women Tool) Number of Women Interviewed By FW</a:t>
-            </a:r>
-            <a:endParaRPr dirty="0"/>
-          </a:p>
-          <a:p xmlns:a="http://schemas.openxmlformats.org/drawingml/2006/main">
-            <a:r>
-              <a:rPr b="0" dirty="0"/>
-              <a:t>No alt text provided</a:t>
-            </a:r>
-            <a:endParaRPr dirty="0"/>
-          </a:p>
-          <a:p xmlns:a="http://schemas.openxmlformats.org/drawingml/2006/main">
-            <a:r>
-              <a:rPr b="0" dirty="0"/>
-              <a:t/>
-            </a:r>
-            <a:endParaRPr dirty="0"/>
-          </a:p>
-          <a:p xmlns:a="http://schemas.openxmlformats.org/drawingml/2006/main">
-            <a:r>
-              <a:rPr b="1" dirty="0"/>
-              <a:t>Women Tool errors comitted by FW and Tool Section</a:t>
-            </a:r>
-            <a:endParaRPr dirty="0"/>
-          </a:p>
-          <a:p xmlns:a="http://schemas.openxmlformats.org/drawingml/2006/main">
-            <a:r>
-              <a:rPr b="0" dirty="0"/>
-              <a:t>No alt text provided</a:t>
-            </a:r>
-            <a:endParaRPr dirty="0"/>
-          </a:p>
-          <a:p xmlns:a="http://schemas.openxmlformats.org/drawingml/2006/main">
-            <a:r>
-              <a:rPr b="0" dirty="0"/>
-              <a:t/>
-            </a:r>
-            <a:endParaRPr dirty="0"/>
-          </a:p>
-          <a:p xmlns:a="http://schemas.openxmlformats.org/drawingml/2006/main">
-            <a:r>
-              <a:rPr b="1" dirty="0"/>
-              <a:t>(Women Tool) Number of Women by HH status Interviewed By FW</a:t>
+              <a:t>(Women Tool) Number of Women Interviewed By FW as of Today</a:t>
             </a:r>
             <a:endParaRPr dirty="0"/>
           </a:p>
@@ -380,7 +296,154 @@
           <a:p xmlns:a="http://schemas.openxmlformats.org/drawingml/2006/main">
             <a:r>
               <a:rPr b="1" dirty="0"/>
-              <a:t>shape</a:t>
+              <a:t>gauge</a:t>
+            </a:r>
+            <a:endParaRPr dirty="0"/>
+          </a:p>
+          <a:p xmlns:a="http://schemas.openxmlformats.org/drawingml/2006/main">
+            <a:r>
+              <a:rPr b="0" dirty="0"/>
+              <a:t>No alt text provided</a:t>
+            </a:r>
+            <a:endParaRPr dirty="0"/>
+          </a:p>
+          <a:p xmlns:a="http://schemas.openxmlformats.org/drawingml/2006/main">
+            <a:r>
+              <a:rPr b="0" dirty="0"/>
+              <a:t/>
+            </a:r>
+            <a:endParaRPr dirty="0"/>
+          </a:p>
+          <a:p xmlns:a="http://schemas.openxmlformats.org/drawingml/2006/main">
+            <a:r>
+              <a:rPr b="1" dirty="0"/>
+              <a:t>Cumulative Interviews Conducted By Field Worker</a:t>
+            </a:r>
+            <a:endParaRPr dirty="0"/>
+          </a:p>
+          <a:p xmlns:a="http://schemas.openxmlformats.org/drawingml/2006/main">
+            <a:r>
+              <a:rPr b="0" dirty="0"/>
+              <a:t>No alt text provided</a:t>
+            </a:r>
+            <a:endParaRPr dirty="0"/>
+          </a:p>
+          <a:p xmlns:a="http://schemas.openxmlformats.org/drawingml/2006/main">
+            <a:r>
+              <a:rPr b="0" dirty="0"/>
+              <a:t/>
+            </a:r>
+            <a:endParaRPr dirty="0"/>
+          </a:p>
+          <a:p xmlns:a="http://schemas.openxmlformats.org/drawingml/2006/main">
+            <a:r>
+              <a:rPr b="1" dirty="0"/>
+              <a:t>gauge</a:t>
+            </a:r>
+            <a:endParaRPr dirty="0"/>
+          </a:p>
+          <a:p xmlns:a="http://schemas.openxmlformats.org/drawingml/2006/main">
+            <a:r>
+              <a:rPr b="0" dirty="0"/>
+              <a:t>No alt text provided</a:t>
+            </a:r>
+            <a:endParaRPr dirty="0"/>
+          </a:p>
+          <a:p xmlns:a="http://schemas.openxmlformats.org/drawingml/2006/main">
+            <a:r>
+              <a:rPr b="0" dirty="0"/>
+              <a:t/>
+            </a:r>
+            <a:endParaRPr dirty="0"/>
+          </a:p>
+          <a:p xmlns:a="http://schemas.openxmlformats.org/drawingml/2006/main">
+            <a:r>
+              <a:rPr b="1" dirty="0"/>
+              <a:t>Cumulative  Women Interviews Conducted By Field Worker</a:t>
+            </a:r>
+            <a:endParaRPr dirty="0"/>
+          </a:p>
+          <a:p xmlns:a="http://schemas.openxmlformats.org/drawingml/2006/main">
+            <a:r>
+              <a:rPr b="0" dirty="0"/>
+              <a:t>No alt text provided</a:t>
+            </a:r>
+            <a:endParaRPr dirty="0"/>
+          </a:p>
+          <a:p xmlns:a="http://schemas.openxmlformats.org/drawingml/2006/main">
+            <a:r>
+              <a:rPr b="0" dirty="0"/>
+              <a:t/>
+            </a:r>
+            <a:endParaRPr dirty="0"/>
+          </a:p>
+          <a:p xmlns:a="http://schemas.openxmlformats.org/drawingml/2006/main">
+            <a:r>
+              <a:rPr b="1" dirty="0"/>
+              <a:t>card</a:t>
+            </a:r>
+            <a:endParaRPr dirty="0"/>
+          </a:p>
+          <a:p xmlns:a="http://schemas.openxmlformats.org/drawingml/2006/main">
+            <a:r>
+              <a:rPr b="0" dirty="0"/>
+              <a:t>No alt text provided</a:t>
+            </a:r>
+            <a:endParaRPr dirty="0"/>
+          </a:p>
+          <a:p xmlns:a="http://schemas.openxmlformats.org/drawingml/2006/main">
+            <a:r>
+              <a:rPr b="0" dirty="0"/>
+              <a:t/>
+            </a:r>
+            <a:endParaRPr dirty="0"/>
+          </a:p>
+          <a:p xmlns:a="http://schemas.openxmlformats.org/drawingml/2006/main">
+            <a:r>
+              <a:rPr b="1" dirty="0"/>
+              <a:t>Cumulative HCWs Interviews Conducted By Field Worker</a:t>
+            </a:r>
+            <a:endParaRPr dirty="0"/>
+          </a:p>
+          <a:p xmlns:a="http://schemas.openxmlformats.org/drawingml/2006/main">
+            <a:r>
+              <a:rPr b="0" dirty="0"/>
+              <a:t>No alt text provided</a:t>
+            </a:r>
+            <a:endParaRPr dirty="0"/>
+          </a:p>
+          <a:p xmlns:a="http://schemas.openxmlformats.org/drawingml/2006/main">
+            <a:r>
+              <a:rPr b="0" dirty="0"/>
+              <a:t/>
+            </a:r>
+            <a:endParaRPr dirty="0"/>
+          </a:p>
+          <a:p xmlns:a="http://schemas.openxmlformats.org/drawingml/2006/main">
+            <a:r>
+              <a:rPr b="1" dirty="0"/>
+              <a:t>card</a:t>
+            </a:r>
+            <a:endParaRPr dirty="0"/>
+          </a:p>
+          <a:p xmlns:a="http://schemas.openxmlformats.org/drawingml/2006/main">
+            <a:r>
+              <a:rPr b="0" dirty="0"/>
+              <a:t>No alt text provided</a:t>
+            </a:r>
+            <a:endParaRPr dirty="0"/>
+          </a:p>
+          <a:p xmlns:a="http://schemas.openxmlformats.org/drawingml/2006/main">
+            <a:r>
+              <a:rPr b="0" dirty="0"/>
+              <a:t/>
+            </a:r>
+            <a:endParaRPr dirty="0"/>
+          </a:p>
+          <a:p xmlns:a="http://schemas.openxmlformats.org/drawingml/2006/main">
+            <a:r>
+              <a:rPr b="1" dirty="0"/>
+              <a:t>Cumulative HCWs Interviews By Type of Health Facility</a:t>
             </a:r>
             <a:endParaRPr dirty="0"/>
           </a:p>
@@ -2424,7 +2487,7 @@
           <a:p xmlns:a="http://schemas.openxmlformats.org/drawingml/2006/main">
             <a:r>
               <a:rPr b="1" dirty="0"/>
-              <a:t>Interviews Conducted By Field Worker</a:t>
+              <a:t>HCWs Interviews By Type of Health Facility</a:t>
             </a:r>
             <a:endParaRPr dirty="0"/>
           </a:p>
@@ -6355,7 +6418,7 @@
                 <a:ea typeface="Segoe UI" charset="0"/>
                 <a:cs typeface="Segoe UI" charset="0"/>
               </a:rPr>
-              <a:t>12/12/2025 11:36:24 PM UTC</a:t>
+              <a:t>12/14/2025 12:07:42 AM UTC</a:t>
             </a:r>
           </a:p>
         </p:txBody>
@@ -6412,7 +6475,7 @@
                 <a:ea typeface="Segoe UI" charset="0"/>
                 <a:cs typeface="Segoe UI" charset="0"/>
               </a:rPr>
-              <a:t>12/12/2025 11:32:17 PM UTC</a:t>
+              <a:t>12/14/2025 12:06:48 AM UTC</a:t>
             </a:r>
             <a:endParaRPr lang="en-US" sz="900" b="0" i="0" dirty="0">
               <a:solidFill>
@@ -6516,7 +6579,7 @@
       <p:grpSpPr/>
       <p:pic>
         <p:nvPicPr>
-          <p:cNvPr id="3" name="Picture" title="This slide contains the following visuals: HH Members Interviewed By FW ,actionButton ,card ,textbox ,textbox ,(HH Member Tool) Type of respondent interviewed by field worker ,HH members errors comitted by FW and Tool Section ,(Women Tool) Number of Women Interviewed By FW ,Women Tool errors comitted by FW and Tool Section ,(Women Tool) Number of Women by HH status Interviewed By FW ,shape ,shape. Please refer to the notes on this slide for details">
+          <p:cNvPr id="3" name="Picture" title="This slide contains the following visuals: HH Members Interviewed By FW as of Today ,actionButton ,card ,textbox ,textbox ,(Women Tool) Number of Women Interviewed By FW as of Today ,shape ,gauge ,Cumulative Interviews Conducted By Field Worker ,gauge ,Cumulative  Women Interviews Conducted By Field Worker ,card ,Cumulative HCWs Interviews Conducted By Field Worker ,card ,Cumulative HCWs Interviews By Type of Health Facility. Please refer to the notes on this slide for details">
             <a:hlinkClick xmlns:r="http://schemas.openxmlformats.org/officeDocument/2006/relationships" xmlns:a="http://schemas.openxmlformats.org/drawingml/2006/main" r:id="RelId0"/>
           </p:cNvPr>
           <p:cNvPicPr>
@@ -6525,7 +6588,7 @@
           <p:nvPr/>
         </p:nvPicPr>
         <p:blipFill>
-          <a:blip xmlns:r="http://schemas.openxmlformats.org/officeDocument/2006/relationships" xmlns:a="http://schemas.openxmlformats.org/drawingml/2006/main" r:embed="imgId44310877"/>
+          <a:blip xmlns:r="http://schemas.openxmlformats.org/officeDocument/2006/relationships" xmlns:a="http://schemas.openxmlformats.org/drawingml/2006/main" r:embed="imgId44329422"/>
           <a:stretch xmlns:a="http://schemas.openxmlformats.org/drawingml/2006/main">
             <a:fillRect/>
           </a:stretch>
@@ -6591,7 +6654,7 @@
           <p:nvPr/>
         </p:nvPicPr>
         <p:blipFill>
-          <a:blip xmlns:r="http://schemas.openxmlformats.org/officeDocument/2006/relationships" xmlns:a="http://schemas.openxmlformats.org/drawingml/2006/main" r:embed="imgId44310878"/>
+          <a:blip xmlns:r="http://schemas.openxmlformats.org/officeDocument/2006/relationships" xmlns:a="http://schemas.openxmlformats.org/drawingml/2006/main" r:embed="imgId44329424"/>
           <a:stretch xmlns:a="http://schemas.openxmlformats.org/drawingml/2006/main">
             <a:fillRect/>
           </a:stretch>
@@ -6657,7 +6720,7 @@
           <p:nvPr/>
         </p:nvPicPr>
         <p:blipFill>
-          <a:blip xmlns:r="http://schemas.openxmlformats.org/officeDocument/2006/relationships" xmlns:a="http://schemas.openxmlformats.org/drawingml/2006/main" r:embed="imgId44310879"/>
+          <a:blip xmlns:r="http://schemas.openxmlformats.org/officeDocument/2006/relationships" xmlns:a="http://schemas.openxmlformats.org/drawingml/2006/main" r:embed="imgId44329425"/>
           <a:stretch xmlns:a="http://schemas.openxmlformats.org/drawingml/2006/main">
             <a:fillRect/>
           </a:stretch>
@@ -6723,7 +6786,7 @@
           <p:nvPr/>
         </p:nvPicPr>
         <p:blipFill>
-          <a:blip xmlns:r="http://schemas.openxmlformats.org/officeDocument/2006/relationships" xmlns:a="http://schemas.openxmlformats.org/drawingml/2006/main" r:embed="imgId44310880"/>
+          <a:blip xmlns:r="http://schemas.openxmlformats.org/officeDocument/2006/relationships" xmlns:a="http://schemas.openxmlformats.org/drawingml/2006/main" r:embed="imgId44329426"/>
           <a:stretch xmlns:a="http://schemas.openxmlformats.org/drawingml/2006/main">
             <a:fillRect/>
           </a:stretch>
@@ -6789,7 +6852,7 @@
           <p:nvPr/>
         </p:nvPicPr>
         <p:blipFill>
-          <a:blip xmlns:r="http://schemas.openxmlformats.org/officeDocument/2006/relationships" xmlns:a="http://schemas.openxmlformats.org/drawingml/2006/main" r:embed="imgId44310881"/>
+          <a:blip xmlns:r="http://schemas.openxmlformats.org/officeDocument/2006/relationships" xmlns:a="http://schemas.openxmlformats.org/drawingml/2006/main" r:embed="imgId44329427"/>
           <a:stretch xmlns:a="http://schemas.openxmlformats.org/drawingml/2006/main">
             <a:fillRect/>
           </a:stretch>
@@ -6855,7 +6918,7 @@
           <p:nvPr/>
         </p:nvPicPr>
         <p:blipFill>
-          <a:blip xmlns:r="http://schemas.openxmlformats.org/officeDocument/2006/relationships" xmlns:a="http://schemas.openxmlformats.org/drawingml/2006/main" r:embed="imgId44310882"/>
+          <a:blip xmlns:r="http://schemas.openxmlformats.org/officeDocument/2006/relationships" xmlns:a="http://schemas.openxmlformats.org/drawingml/2006/main" r:embed="imgId44329428"/>
           <a:stretch xmlns:a="http://schemas.openxmlformats.org/drawingml/2006/main">
             <a:fillRect/>
           </a:stretch>
@@ -6921,7 +6984,7 @@
           <p:nvPr/>
         </p:nvPicPr>
         <p:blipFill>
-          <a:blip xmlns:r="http://schemas.openxmlformats.org/officeDocument/2006/relationships" xmlns:a="http://schemas.openxmlformats.org/drawingml/2006/main" r:embed="imgId44310883"/>
+          <a:blip xmlns:r="http://schemas.openxmlformats.org/officeDocument/2006/relationships" xmlns:a="http://schemas.openxmlformats.org/drawingml/2006/main" r:embed="imgId44329429"/>
           <a:stretch xmlns:a="http://schemas.openxmlformats.org/drawingml/2006/main">
             <a:fillRect/>
           </a:stretch>
@@ -6978,7 +7041,7 @@
       <p:grpSpPr/>
       <p:pic>
         <p:nvPicPr>
-          <p:cNvPr id="3" name="Picture" title="This slide contains the following visuals: card ,multiRowCard ,Number of Participants Interviewed in Hospitals By Field Worker ,slicer ,slicer ,slicer ,slicer ,Number of Participants Interviewed in Health Centers By Field Worker ,Number of Participants Interviewed in CHPS By Field Worker ,Interviews Conducted By Field Worker ,card ,textbox ,textbox ,textbox. Please refer to the notes on this slide for details">
+          <p:cNvPr id="3" name="Picture" title="This slide contains the following visuals: card ,multiRowCard ,Number of Participants Interviewed in Hospitals By Field Worker ,slicer ,slicer ,slicer ,slicer ,Number of Participants Interviewed in Health Centers By Field Worker ,Number of Participants Interviewed in CHPS By Field Worker ,HCWs Interviews By Type of Health Facility ,card ,textbox ,textbox ,textbox. Please refer to the notes on this slide for details">
             <a:hlinkClick xmlns:r="http://schemas.openxmlformats.org/officeDocument/2006/relationships" xmlns:a="http://schemas.openxmlformats.org/drawingml/2006/main" r:id="RelId7"/>
           </p:cNvPr>
           <p:cNvPicPr>
@@ -6987,7 +7050,7 @@
           <p:nvPr/>
         </p:nvPicPr>
         <p:blipFill>
-          <a:blip xmlns:r="http://schemas.openxmlformats.org/officeDocument/2006/relationships" xmlns:a="http://schemas.openxmlformats.org/drawingml/2006/main" r:embed="imgId44310884"/>
+          <a:blip xmlns:r="http://schemas.openxmlformats.org/officeDocument/2006/relationships" xmlns:a="http://schemas.openxmlformats.org/drawingml/2006/main" r:embed="imgId44329430"/>
           <a:stretch xmlns:a="http://schemas.openxmlformats.org/drawingml/2006/main">
             <a:fillRect/>
           </a:stretch>
@@ -7053,7 +7116,7 @@
           <p:nvPr/>
         </p:nvPicPr>
         <p:blipFill>
-          <a:blip xmlns:r="http://schemas.openxmlformats.org/officeDocument/2006/relationships" xmlns:a="http://schemas.openxmlformats.org/drawingml/2006/main" r:embed="imgId44310885"/>
+          <a:blip xmlns:r="http://schemas.openxmlformats.org/officeDocument/2006/relationships" xmlns:a="http://schemas.openxmlformats.org/drawingml/2006/main" r:embed="imgId44329431"/>
           <a:stretch xmlns:a="http://schemas.openxmlformats.org/drawingml/2006/main">
             <a:fillRect/>
           </a:stretch>
@@ -7119,7 +7182,7 @@
           <p:nvPr/>
         </p:nvPicPr>
         <p:blipFill>
-          <a:blip xmlns:r="http://schemas.openxmlformats.org/officeDocument/2006/relationships" xmlns:a="http://schemas.openxmlformats.org/drawingml/2006/main" r:embed="imgId44310886"/>
+          <a:blip xmlns:r="http://schemas.openxmlformats.org/officeDocument/2006/relationships" xmlns:a="http://schemas.openxmlformats.org/drawingml/2006/main" r:embed="imgId44329432"/>
           <a:stretch xmlns:a="http://schemas.openxmlformats.org/drawingml/2006/main">
             <a:fillRect/>
           </a:stretch>

--- a/reports/PowerBI/HeMAB_QA_Dashboard_Latest.pptx
+++ b/reports/PowerBI/HeMAB_QA_Dashboard_Latest.pptx
@@ -6418,7 +6418,7 @@
                 <a:ea typeface="Segoe UI" charset="0"/>
                 <a:cs typeface="Segoe UI" charset="0"/>
               </a:rPr>
-              <a:t>12/14/2025 12:07:42 AM UTC</a:t>
+              <a:t>12/17/2025 9:57:37 AM UTC</a:t>
             </a:r>
           </a:p>
         </p:txBody>
@@ -6475,7 +6475,7 @@
                 <a:ea typeface="Segoe UI" charset="0"/>
                 <a:cs typeface="Segoe UI" charset="0"/>
               </a:rPr>
-              <a:t>12/14/2025 12:06:48 AM UTC</a:t>
+              <a:t>12/17/2025 9:55:32 AM UTC</a:t>
             </a:r>
             <a:endParaRPr lang="en-US" sz="900" b="0" i="0" dirty="0">
               <a:solidFill>
@@ -6588,15 +6588,15 @@
           <p:nvPr/>
         </p:nvPicPr>
         <p:blipFill>
-          <a:blip xmlns:r="http://schemas.openxmlformats.org/officeDocument/2006/relationships" xmlns:a="http://schemas.openxmlformats.org/drawingml/2006/main" r:embed="imgId44329422"/>
+          <a:blip xmlns:r="http://schemas.openxmlformats.org/officeDocument/2006/relationships" xmlns:a="http://schemas.openxmlformats.org/drawingml/2006/main" r:embed="imgId44474607"/>
           <a:stretch xmlns:a="http://schemas.openxmlformats.org/drawingml/2006/main">
             <a:fillRect/>
           </a:stretch>
         </p:blipFill>
         <p:spPr>
           <a:xfrm xmlns:a="http://schemas.openxmlformats.org/drawingml/2006/main">
-            <a:off x="2343150" y="0"/>
-            <a:ext cx="7496175" cy="6858000"/>
+            <a:off x="866775" y="0"/>
+            <a:ext cx="10448925" cy="6848475"/>
           </a:xfrm>
           <a:prstGeom xmlns:a="http://schemas.openxmlformats.org/drawingml/2006/main" prst="rect">
             <a:avLst/>
@@ -6654,7 +6654,7 @@
           <p:nvPr/>
         </p:nvPicPr>
         <p:blipFill>
-          <a:blip xmlns:r="http://schemas.openxmlformats.org/officeDocument/2006/relationships" xmlns:a="http://schemas.openxmlformats.org/drawingml/2006/main" r:embed="imgId44329424"/>
+          <a:blip xmlns:r="http://schemas.openxmlformats.org/officeDocument/2006/relationships" xmlns:a="http://schemas.openxmlformats.org/drawingml/2006/main" r:embed="imgId44474609"/>
           <a:stretch xmlns:a="http://schemas.openxmlformats.org/drawingml/2006/main">
             <a:fillRect/>
           </a:stretch>
@@ -6720,7 +6720,7 @@
           <p:nvPr/>
         </p:nvPicPr>
         <p:blipFill>
-          <a:blip xmlns:r="http://schemas.openxmlformats.org/officeDocument/2006/relationships" xmlns:a="http://schemas.openxmlformats.org/drawingml/2006/main" r:embed="imgId44329425"/>
+          <a:blip xmlns:r="http://schemas.openxmlformats.org/officeDocument/2006/relationships" xmlns:a="http://schemas.openxmlformats.org/drawingml/2006/main" r:embed="imgId44474610"/>
           <a:stretch xmlns:a="http://schemas.openxmlformats.org/drawingml/2006/main">
             <a:fillRect/>
           </a:stretch>
@@ -6786,7 +6786,7 @@
           <p:nvPr/>
         </p:nvPicPr>
         <p:blipFill>
-          <a:blip xmlns:r="http://schemas.openxmlformats.org/officeDocument/2006/relationships" xmlns:a="http://schemas.openxmlformats.org/drawingml/2006/main" r:embed="imgId44329426"/>
+          <a:blip xmlns:r="http://schemas.openxmlformats.org/officeDocument/2006/relationships" xmlns:a="http://schemas.openxmlformats.org/drawingml/2006/main" r:embed="imgId44474611"/>
           <a:stretch xmlns:a="http://schemas.openxmlformats.org/drawingml/2006/main">
             <a:fillRect/>
           </a:stretch>
@@ -6852,7 +6852,7 @@
           <p:nvPr/>
         </p:nvPicPr>
         <p:blipFill>
-          <a:blip xmlns:r="http://schemas.openxmlformats.org/officeDocument/2006/relationships" xmlns:a="http://schemas.openxmlformats.org/drawingml/2006/main" r:embed="imgId44329427"/>
+          <a:blip xmlns:r="http://schemas.openxmlformats.org/officeDocument/2006/relationships" xmlns:a="http://schemas.openxmlformats.org/drawingml/2006/main" r:embed="imgId44474612"/>
           <a:stretch xmlns:a="http://schemas.openxmlformats.org/drawingml/2006/main">
             <a:fillRect/>
           </a:stretch>
@@ -6918,7 +6918,7 @@
           <p:nvPr/>
         </p:nvPicPr>
         <p:blipFill>
-          <a:blip xmlns:r="http://schemas.openxmlformats.org/officeDocument/2006/relationships" xmlns:a="http://schemas.openxmlformats.org/drawingml/2006/main" r:embed="imgId44329428"/>
+          <a:blip xmlns:r="http://schemas.openxmlformats.org/officeDocument/2006/relationships" xmlns:a="http://schemas.openxmlformats.org/drawingml/2006/main" r:embed="imgId44474613"/>
           <a:stretch xmlns:a="http://schemas.openxmlformats.org/drawingml/2006/main">
             <a:fillRect/>
           </a:stretch>
@@ -6984,7 +6984,7 @@
           <p:nvPr/>
         </p:nvPicPr>
         <p:blipFill>
-          <a:blip xmlns:r="http://schemas.openxmlformats.org/officeDocument/2006/relationships" xmlns:a="http://schemas.openxmlformats.org/drawingml/2006/main" r:embed="imgId44329429"/>
+          <a:blip xmlns:r="http://schemas.openxmlformats.org/officeDocument/2006/relationships" xmlns:a="http://schemas.openxmlformats.org/drawingml/2006/main" r:embed="imgId44474614"/>
           <a:stretch xmlns:a="http://schemas.openxmlformats.org/drawingml/2006/main">
             <a:fillRect/>
           </a:stretch>
@@ -7050,7 +7050,7 @@
           <p:nvPr/>
         </p:nvPicPr>
         <p:blipFill>
-          <a:blip xmlns:r="http://schemas.openxmlformats.org/officeDocument/2006/relationships" xmlns:a="http://schemas.openxmlformats.org/drawingml/2006/main" r:embed="imgId44329430"/>
+          <a:blip xmlns:r="http://schemas.openxmlformats.org/officeDocument/2006/relationships" xmlns:a="http://schemas.openxmlformats.org/drawingml/2006/main" r:embed="imgId44474615"/>
           <a:stretch xmlns:a="http://schemas.openxmlformats.org/drawingml/2006/main">
             <a:fillRect/>
           </a:stretch>
@@ -7116,7 +7116,7 @@
           <p:nvPr/>
         </p:nvPicPr>
         <p:blipFill>
-          <a:blip xmlns:r="http://schemas.openxmlformats.org/officeDocument/2006/relationships" xmlns:a="http://schemas.openxmlformats.org/drawingml/2006/main" r:embed="imgId44329431"/>
+          <a:blip xmlns:r="http://schemas.openxmlformats.org/officeDocument/2006/relationships" xmlns:a="http://schemas.openxmlformats.org/drawingml/2006/main" r:embed="imgId44474616"/>
           <a:stretch xmlns:a="http://schemas.openxmlformats.org/drawingml/2006/main">
             <a:fillRect/>
           </a:stretch>
@@ -7182,7 +7182,7 @@
           <p:nvPr/>
         </p:nvPicPr>
         <p:blipFill>
-          <a:blip xmlns:r="http://schemas.openxmlformats.org/officeDocument/2006/relationships" xmlns:a="http://schemas.openxmlformats.org/drawingml/2006/main" r:embed="imgId44329432"/>
+          <a:blip xmlns:r="http://schemas.openxmlformats.org/officeDocument/2006/relationships" xmlns:a="http://schemas.openxmlformats.org/drawingml/2006/main" r:embed="imgId44474617"/>
           <a:stretch xmlns:a="http://schemas.openxmlformats.org/drawingml/2006/main">
             <a:fillRect/>
           </a:stretch>

--- a/reports/PowerBI/HeMAB_QA_Dashboard_Latest.pptx
+++ b/reports/PowerBI/HeMAB_QA_Dashboard_Latest.pptx
@@ -6418,7 +6418,7 @@
                 <a:ea typeface="Segoe UI" charset="0"/>
                 <a:cs typeface="Segoe UI" charset="0"/>
               </a:rPr>
-              <a:t>12/17/2025 9:57:37 AM UTC</a:t>
+              <a:t>12/19/2025 1:48:46 PM UTC</a:t>
             </a:r>
           </a:p>
         </p:txBody>
@@ -6475,7 +6475,7 @@
                 <a:ea typeface="Segoe UI" charset="0"/>
                 <a:cs typeface="Segoe UI" charset="0"/>
               </a:rPr>
-              <a:t>12/17/2025 9:55:32 AM UTC</a:t>
+              <a:t>12/19/2025 1:47:30 PM UTC</a:t>
             </a:r>
             <a:endParaRPr lang="en-US" sz="900" b="0" i="0" dirty="0">
               <a:solidFill>
@@ -6588,7 +6588,7 @@
           <p:nvPr/>
         </p:nvPicPr>
         <p:blipFill>
-          <a:blip xmlns:r="http://schemas.openxmlformats.org/officeDocument/2006/relationships" xmlns:a="http://schemas.openxmlformats.org/drawingml/2006/main" r:embed="imgId44474607"/>
+          <a:blip xmlns:r="http://schemas.openxmlformats.org/officeDocument/2006/relationships" xmlns:a="http://schemas.openxmlformats.org/drawingml/2006/main" r:embed="imgId44583186"/>
           <a:stretch xmlns:a="http://schemas.openxmlformats.org/drawingml/2006/main">
             <a:fillRect/>
           </a:stretch>
@@ -6654,7 +6654,7 @@
           <p:nvPr/>
         </p:nvPicPr>
         <p:blipFill>
-          <a:blip xmlns:r="http://schemas.openxmlformats.org/officeDocument/2006/relationships" xmlns:a="http://schemas.openxmlformats.org/drawingml/2006/main" r:embed="imgId44474609"/>
+          <a:blip xmlns:r="http://schemas.openxmlformats.org/officeDocument/2006/relationships" xmlns:a="http://schemas.openxmlformats.org/drawingml/2006/main" r:embed="imgId44583188"/>
           <a:stretch xmlns:a="http://schemas.openxmlformats.org/drawingml/2006/main">
             <a:fillRect/>
           </a:stretch>
@@ -6720,7 +6720,7 @@
           <p:nvPr/>
         </p:nvPicPr>
         <p:blipFill>
-          <a:blip xmlns:r="http://schemas.openxmlformats.org/officeDocument/2006/relationships" xmlns:a="http://schemas.openxmlformats.org/drawingml/2006/main" r:embed="imgId44474610"/>
+          <a:blip xmlns:r="http://schemas.openxmlformats.org/officeDocument/2006/relationships" xmlns:a="http://schemas.openxmlformats.org/drawingml/2006/main" r:embed="imgId44583189"/>
           <a:stretch xmlns:a="http://schemas.openxmlformats.org/drawingml/2006/main">
             <a:fillRect/>
           </a:stretch>
@@ -6786,7 +6786,7 @@
           <p:nvPr/>
         </p:nvPicPr>
         <p:blipFill>
-          <a:blip xmlns:r="http://schemas.openxmlformats.org/officeDocument/2006/relationships" xmlns:a="http://schemas.openxmlformats.org/drawingml/2006/main" r:embed="imgId44474611"/>
+          <a:blip xmlns:r="http://schemas.openxmlformats.org/officeDocument/2006/relationships" xmlns:a="http://schemas.openxmlformats.org/drawingml/2006/main" r:embed="imgId44583190"/>
           <a:stretch xmlns:a="http://schemas.openxmlformats.org/drawingml/2006/main">
             <a:fillRect/>
           </a:stretch>
@@ -6852,7 +6852,7 @@
           <p:nvPr/>
         </p:nvPicPr>
         <p:blipFill>
-          <a:blip xmlns:r="http://schemas.openxmlformats.org/officeDocument/2006/relationships" xmlns:a="http://schemas.openxmlformats.org/drawingml/2006/main" r:embed="imgId44474612"/>
+          <a:blip xmlns:r="http://schemas.openxmlformats.org/officeDocument/2006/relationships" xmlns:a="http://schemas.openxmlformats.org/drawingml/2006/main" r:embed="imgId44583191"/>
           <a:stretch xmlns:a="http://schemas.openxmlformats.org/drawingml/2006/main">
             <a:fillRect/>
           </a:stretch>
@@ -6918,7 +6918,7 @@
           <p:nvPr/>
         </p:nvPicPr>
         <p:blipFill>
-          <a:blip xmlns:r="http://schemas.openxmlformats.org/officeDocument/2006/relationships" xmlns:a="http://schemas.openxmlformats.org/drawingml/2006/main" r:embed="imgId44474613"/>
+          <a:blip xmlns:r="http://schemas.openxmlformats.org/officeDocument/2006/relationships" xmlns:a="http://schemas.openxmlformats.org/drawingml/2006/main" r:embed="imgId44583192"/>
           <a:stretch xmlns:a="http://schemas.openxmlformats.org/drawingml/2006/main">
             <a:fillRect/>
           </a:stretch>
@@ -6984,7 +6984,7 @@
           <p:nvPr/>
         </p:nvPicPr>
         <p:blipFill>
-          <a:blip xmlns:r="http://schemas.openxmlformats.org/officeDocument/2006/relationships" xmlns:a="http://schemas.openxmlformats.org/drawingml/2006/main" r:embed="imgId44474614"/>
+          <a:blip xmlns:r="http://schemas.openxmlformats.org/officeDocument/2006/relationships" xmlns:a="http://schemas.openxmlformats.org/drawingml/2006/main" r:embed="imgId44583193"/>
           <a:stretch xmlns:a="http://schemas.openxmlformats.org/drawingml/2006/main">
             <a:fillRect/>
           </a:stretch>
@@ -7050,7 +7050,7 @@
           <p:nvPr/>
         </p:nvPicPr>
         <p:blipFill>
-          <a:blip xmlns:r="http://schemas.openxmlformats.org/officeDocument/2006/relationships" xmlns:a="http://schemas.openxmlformats.org/drawingml/2006/main" r:embed="imgId44474615"/>
+          <a:blip xmlns:r="http://schemas.openxmlformats.org/officeDocument/2006/relationships" xmlns:a="http://schemas.openxmlformats.org/drawingml/2006/main" r:embed="imgId44583194"/>
           <a:stretch xmlns:a="http://schemas.openxmlformats.org/drawingml/2006/main">
             <a:fillRect/>
           </a:stretch>
@@ -7116,7 +7116,7 @@
           <p:nvPr/>
         </p:nvPicPr>
         <p:blipFill>
-          <a:blip xmlns:r="http://schemas.openxmlformats.org/officeDocument/2006/relationships" xmlns:a="http://schemas.openxmlformats.org/drawingml/2006/main" r:embed="imgId44474616"/>
+          <a:blip xmlns:r="http://schemas.openxmlformats.org/officeDocument/2006/relationships" xmlns:a="http://schemas.openxmlformats.org/drawingml/2006/main" r:embed="imgId44583195"/>
           <a:stretch xmlns:a="http://schemas.openxmlformats.org/drawingml/2006/main">
             <a:fillRect/>
           </a:stretch>
@@ -7182,7 +7182,7 @@
           <p:nvPr/>
         </p:nvPicPr>
         <p:blipFill>
-          <a:blip xmlns:r="http://schemas.openxmlformats.org/officeDocument/2006/relationships" xmlns:a="http://schemas.openxmlformats.org/drawingml/2006/main" r:embed="imgId44474617"/>
+          <a:blip xmlns:r="http://schemas.openxmlformats.org/officeDocument/2006/relationships" xmlns:a="http://schemas.openxmlformats.org/drawingml/2006/main" r:embed="imgId44583196"/>
           <a:stretch xmlns:a="http://schemas.openxmlformats.org/drawingml/2006/main">
             <a:fillRect/>
           </a:stretch>

--- a/reports/PowerBI/HeMAB_QA_Dashboard_Latest.pptx
+++ b/reports/PowerBI/HeMAB_QA_Dashboard_Latest.pptx
@@ -6418,7 +6418,7 @@
                 <a:ea typeface="Segoe UI" charset="0"/>
                 <a:cs typeface="Segoe UI" charset="0"/>
               </a:rPr>
-              <a:t>12/19/2025 1:48:46 PM UTC</a:t>
+              <a:t>12/20/2025 1:20:41 AM UTC</a:t>
             </a:r>
           </a:p>
         </p:txBody>
@@ -6475,7 +6475,7 @@
                 <a:ea typeface="Segoe UI" charset="0"/>
                 <a:cs typeface="Segoe UI" charset="0"/>
               </a:rPr>
-              <a:t>12/19/2025 1:47:30 PM UTC</a:t>
+              <a:t>12/20/2025 1:19:47 AM UTC</a:t>
             </a:r>
             <a:endParaRPr lang="en-US" sz="900" b="0" i="0" dirty="0">
               <a:solidFill>
@@ -6588,7 +6588,7 @@
           <p:nvPr/>
         </p:nvPicPr>
         <p:blipFill>
-          <a:blip xmlns:r="http://schemas.openxmlformats.org/officeDocument/2006/relationships" xmlns:a="http://schemas.openxmlformats.org/drawingml/2006/main" r:embed="imgId44583186"/>
+          <a:blip xmlns:r="http://schemas.openxmlformats.org/officeDocument/2006/relationships" xmlns:a="http://schemas.openxmlformats.org/drawingml/2006/main" r:embed="imgId44594337"/>
           <a:stretch xmlns:a="http://schemas.openxmlformats.org/drawingml/2006/main">
             <a:fillRect/>
           </a:stretch>
@@ -6654,7 +6654,7 @@
           <p:nvPr/>
         </p:nvPicPr>
         <p:blipFill>
-          <a:blip xmlns:r="http://schemas.openxmlformats.org/officeDocument/2006/relationships" xmlns:a="http://schemas.openxmlformats.org/drawingml/2006/main" r:embed="imgId44583188"/>
+          <a:blip xmlns:r="http://schemas.openxmlformats.org/officeDocument/2006/relationships" xmlns:a="http://schemas.openxmlformats.org/drawingml/2006/main" r:embed="imgId44594339"/>
           <a:stretch xmlns:a="http://schemas.openxmlformats.org/drawingml/2006/main">
             <a:fillRect/>
           </a:stretch>
@@ -6720,7 +6720,7 @@
           <p:nvPr/>
         </p:nvPicPr>
         <p:blipFill>
-          <a:blip xmlns:r="http://schemas.openxmlformats.org/officeDocument/2006/relationships" xmlns:a="http://schemas.openxmlformats.org/drawingml/2006/main" r:embed="imgId44583189"/>
+          <a:blip xmlns:r="http://schemas.openxmlformats.org/officeDocument/2006/relationships" xmlns:a="http://schemas.openxmlformats.org/drawingml/2006/main" r:embed="imgId44594340"/>
           <a:stretch xmlns:a="http://schemas.openxmlformats.org/drawingml/2006/main">
             <a:fillRect/>
           </a:stretch>
@@ -6786,7 +6786,7 @@
           <p:nvPr/>
         </p:nvPicPr>
         <p:blipFill>
-          <a:blip xmlns:r="http://schemas.openxmlformats.org/officeDocument/2006/relationships" xmlns:a="http://schemas.openxmlformats.org/drawingml/2006/main" r:embed="imgId44583190"/>
+          <a:blip xmlns:r="http://schemas.openxmlformats.org/officeDocument/2006/relationships" xmlns:a="http://schemas.openxmlformats.org/drawingml/2006/main" r:embed="imgId44594341"/>
           <a:stretch xmlns:a="http://schemas.openxmlformats.org/drawingml/2006/main">
             <a:fillRect/>
           </a:stretch>
@@ -6852,7 +6852,7 @@
           <p:nvPr/>
         </p:nvPicPr>
         <p:blipFill>
-          <a:blip xmlns:r="http://schemas.openxmlformats.org/officeDocument/2006/relationships" xmlns:a="http://schemas.openxmlformats.org/drawingml/2006/main" r:embed="imgId44583191"/>
+          <a:blip xmlns:r="http://schemas.openxmlformats.org/officeDocument/2006/relationships" xmlns:a="http://schemas.openxmlformats.org/drawingml/2006/main" r:embed="imgId44594342"/>
           <a:stretch xmlns:a="http://schemas.openxmlformats.org/drawingml/2006/main">
             <a:fillRect/>
           </a:stretch>
@@ -6918,7 +6918,7 @@
           <p:nvPr/>
         </p:nvPicPr>
         <p:blipFill>
-          <a:blip xmlns:r="http://schemas.openxmlformats.org/officeDocument/2006/relationships" xmlns:a="http://schemas.openxmlformats.org/drawingml/2006/main" r:embed="imgId44583192"/>
+          <a:blip xmlns:r="http://schemas.openxmlformats.org/officeDocument/2006/relationships" xmlns:a="http://schemas.openxmlformats.org/drawingml/2006/main" r:embed="imgId44594343"/>
           <a:stretch xmlns:a="http://schemas.openxmlformats.org/drawingml/2006/main">
             <a:fillRect/>
           </a:stretch>
@@ -6984,7 +6984,7 @@
           <p:nvPr/>
         </p:nvPicPr>
         <p:blipFill>
-          <a:blip xmlns:r="http://schemas.openxmlformats.org/officeDocument/2006/relationships" xmlns:a="http://schemas.openxmlformats.org/drawingml/2006/main" r:embed="imgId44583193"/>
+          <a:blip xmlns:r="http://schemas.openxmlformats.org/officeDocument/2006/relationships" xmlns:a="http://schemas.openxmlformats.org/drawingml/2006/main" r:embed="imgId44594344"/>
           <a:stretch xmlns:a="http://schemas.openxmlformats.org/drawingml/2006/main">
             <a:fillRect/>
           </a:stretch>
@@ -7050,7 +7050,7 @@
           <p:nvPr/>
         </p:nvPicPr>
         <p:blipFill>
-          <a:blip xmlns:r="http://schemas.openxmlformats.org/officeDocument/2006/relationships" xmlns:a="http://schemas.openxmlformats.org/drawingml/2006/main" r:embed="imgId44583194"/>
+          <a:blip xmlns:r="http://schemas.openxmlformats.org/officeDocument/2006/relationships" xmlns:a="http://schemas.openxmlformats.org/drawingml/2006/main" r:embed="imgId44594345"/>
           <a:stretch xmlns:a="http://schemas.openxmlformats.org/drawingml/2006/main">
             <a:fillRect/>
           </a:stretch>
@@ -7116,7 +7116,7 @@
           <p:nvPr/>
         </p:nvPicPr>
         <p:blipFill>
-          <a:blip xmlns:r="http://schemas.openxmlformats.org/officeDocument/2006/relationships" xmlns:a="http://schemas.openxmlformats.org/drawingml/2006/main" r:embed="imgId44583195"/>
+          <a:blip xmlns:r="http://schemas.openxmlformats.org/officeDocument/2006/relationships" xmlns:a="http://schemas.openxmlformats.org/drawingml/2006/main" r:embed="imgId44594346"/>
           <a:stretch xmlns:a="http://schemas.openxmlformats.org/drawingml/2006/main">
             <a:fillRect/>
           </a:stretch>
@@ -7182,7 +7182,7 @@
           <p:nvPr/>
         </p:nvPicPr>
         <p:blipFill>
-          <a:blip xmlns:r="http://schemas.openxmlformats.org/officeDocument/2006/relationships" xmlns:a="http://schemas.openxmlformats.org/drawingml/2006/main" r:embed="imgId44583196"/>
+          <a:blip xmlns:r="http://schemas.openxmlformats.org/officeDocument/2006/relationships" xmlns:a="http://schemas.openxmlformats.org/drawingml/2006/main" r:embed="imgId44594347"/>
           <a:stretch xmlns:a="http://schemas.openxmlformats.org/drawingml/2006/main">
             <a:fillRect/>
           </a:stretch>

--- a/reports/PowerBI/HeMAB_QA_Dashboard_Latest.pptx
+++ b/reports/PowerBI/HeMAB_QA_Dashboard_Latest.pptx
@@ -6418,7 +6418,7 @@
                 <a:ea typeface="Segoe UI" charset="0"/>
                 <a:cs typeface="Segoe UI" charset="0"/>
               </a:rPr>
-              <a:t>12/20/2025 1:20:41 AM UTC</a:t>
+              <a:t>12/24/2025 1:59:08 AM UTC</a:t>
             </a:r>
           </a:p>
         </p:txBody>
@@ -6475,7 +6475,7 @@
                 <a:ea typeface="Segoe UI" charset="0"/>
                 <a:cs typeface="Segoe UI" charset="0"/>
               </a:rPr>
-              <a:t>12/20/2025 1:19:47 AM UTC</a:t>
+              <a:t>12/24/2025 1:57:39 AM UTC</a:t>
             </a:r>
             <a:endParaRPr lang="en-US" sz="900" b="0" i="0" dirty="0">
               <a:solidFill>
@@ -6588,7 +6588,7 @@
           <p:nvPr/>
         </p:nvPicPr>
         <p:blipFill>
-          <a:blip xmlns:r="http://schemas.openxmlformats.org/officeDocument/2006/relationships" xmlns:a="http://schemas.openxmlformats.org/drawingml/2006/main" r:embed="imgId44594337"/>
+          <a:blip xmlns:r="http://schemas.openxmlformats.org/officeDocument/2006/relationships" xmlns:a="http://schemas.openxmlformats.org/drawingml/2006/main" r:embed="imgId44710881"/>
           <a:stretch xmlns:a="http://schemas.openxmlformats.org/drawingml/2006/main">
             <a:fillRect/>
           </a:stretch>
@@ -6654,7 +6654,7 @@
           <p:nvPr/>
         </p:nvPicPr>
         <p:blipFill>
-          <a:blip xmlns:r="http://schemas.openxmlformats.org/officeDocument/2006/relationships" xmlns:a="http://schemas.openxmlformats.org/drawingml/2006/main" r:embed="imgId44594339"/>
+          <a:blip xmlns:r="http://schemas.openxmlformats.org/officeDocument/2006/relationships" xmlns:a="http://schemas.openxmlformats.org/drawingml/2006/main" r:embed="imgId44710883"/>
           <a:stretch xmlns:a="http://schemas.openxmlformats.org/drawingml/2006/main">
             <a:fillRect/>
           </a:stretch>
@@ -6720,7 +6720,7 @@
           <p:nvPr/>
         </p:nvPicPr>
         <p:blipFill>
-          <a:blip xmlns:r="http://schemas.openxmlformats.org/officeDocument/2006/relationships" xmlns:a="http://schemas.openxmlformats.org/drawingml/2006/main" r:embed="imgId44594340"/>
+          <a:blip xmlns:r="http://schemas.openxmlformats.org/officeDocument/2006/relationships" xmlns:a="http://schemas.openxmlformats.org/drawingml/2006/main" r:embed="imgId44710884"/>
           <a:stretch xmlns:a="http://schemas.openxmlformats.org/drawingml/2006/main">
             <a:fillRect/>
           </a:stretch>
@@ -6786,7 +6786,7 @@
           <p:nvPr/>
         </p:nvPicPr>
         <p:blipFill>
-          <a:blip xmlns:r="http://schemas.openxmlformats.org/officeDocument/2006/relationships" xmlns:a="http://schemas.openxmlformats.org/drawingml/2006/main" r:embed="imgId44594341"/>
+          <a:blip xmlns:r="http://schemas.openxmlformats.org/officeDocument/2006/relationships" xmlns:a="http://schemas.openxmlformats.org/drawingml/2006/main" r:embed="imgId44710885"/>
           <a:stretch xmlns:a="http://schemas.openxmlformats.org/drawingml/2006/main">
             <a:fillRect/>
           </a:stretch>
@@ -6852,7 +6852,7 @@
           <p:nvPr/>
         </p:nvPicPr>
         <p:blipFill>
-          <a:blip xmlns:r="http://schemas.openxmlformats.org/officeDocument/2006/relationships" xmlns:a="http://schemas.openxmlformats.org/drawingml/2006/main" r:embed="imgId44594342"/>
+          <a:blip xmlns:r="http://schemas.openxmlformats.org/officeDocument/2006/relationships" xmlns:a="http://schemas.openxmlformats.org/drawingml/2006/main" r:embed="imgId44710886"/>
           <a:stretch xmlns:a="http://schemas.openxmlformats.org/drawingml/2006/main">
             <a:fillRect/>
           </a:stretch>
@@ -6918,7 +6918,7 @@
           <p:nvPr/>
         </p:nvPicPr>
         <p:blipFill>
-          <a:blip xmlns:r="http://schemas.openxmlformats.org/officeDocument/2006/relationships" xmlns:a="http://schemas.openxmlformats.org/drawingml/2006/main" r:embed="imgId44594343"/>
+          <a:blip xmlns:r="http://schemas.openxmlformats.org/officeDocument/2006/relationships" xmlns:a="http://schemas.openxmlformats.org/drawingml/2006/main" r:embed="imgId44710887"/>
           <a:stretch xmlns:a="http://schemas.openxmlformats.org/drawingml/2006/main">
             <a:fillRect/>
           </a:stretch>
@@ -6984,7 +6984,7 @@
           <p:nvPr/>
         </p:nvPicPr>
         <p:blipFill>
-          <a:blip xmlns:r="http://schemas.openxmlformats.org/officeDocument/2006/relationships" xmlns:a="http://schemas.openxmlformats.org/drawingml/2006/main" r:embed="imgId44594344"/>
+          <a:blip xmlns:r="http://schemas.openxmlformats.org/officeDocument/2006/relationships" xmlns:a="http://schemas.openxmlformats.org/drawingml/2006/main" r:embed="imgId44710888"/>
           <a:stretch xmlns:a="http://schemas.openxmlformats.org/drawingml/2006/main">
             <a:fillRect/>
           </a:stretch>
@@ -7050,7 +7050,7 @@
           <p:nvPr/>
         </p:nvPicPr>
         <p:blipFill>
-          <a:blip xmlns:r="http://schemas.openxmlformats.org/officeDocument/2006/relationships" xmlns:a="http://schemas.openxmlformats.org/drawingml/2006/main" r:embed="imgId44594345"/>
+          <a:blip xmlns:r="http://schemas.openxmlformats.org/officeDocument/2006/relationships" xmlns:a="http://schemas.openxmlformats.org/drawingml/2006/main" r:embed="imgId44710889"/>
           <a:stretch xmlns:a="http://schemas.openxmlformats.org/drawingml/2006/main">
             <a:fillRect/>
           </a:stretch>
@@ -7116,7 +7116,7 @@
           <p:nvPr/>
         </p:nvPicPr>
         <p:blipFill>
-          <a:blip xmlns:r="http://schemas.openxmlformats.org/officeDocument/2006/relationships" xmlns:a="http://schemas.openxmlformats.org/drawingml/2006/main" r:embed="imgId44594346"/>
+          <a:blip xmlns:r="http://schemas.openxmlformats.org/officeDocument/2006/relationships" xmlns:a="http://schemas.openxmlformats.org/drawingml/2006/main" r:embed="imgId44710890"/>
           <a:stretch xmlns:a="http://schemas.openxmlformats.org/drawingml/2006/main">
             <a:fillRect/>
           </a:stretch>
@@ -7182,7 +7182,7 @@
           <p:nvPr/>
         </p:nvPicPr>
         <p:blipFill>
-          <a:blip xmlns:r="http://schemas.openxmlformats.org/officeDocument/2006/relationships" xmlns:a="http://schemas.openxmlformats.org/drawingml/2006/main" r:embed="imgId44594347"/>
+          <a:blip xmlns:r="http://schemas.openxmlformats.org/officeDocument/2006/relationships" xmlns:a="http://schemas.openxmlformats.org/drawingml/2006/main" r:embed="imgId44710891"/>
           <a:stretch xmlns:a="http://schemas.openxmlformats.org/drawingml/2006/main">
             <a:fillRect/>
           </a:stretch>

--- a/reports/PowerBI/HeMAB_QA_Dashboard_Latest.pptx
+++ b/reports/PowerBI/HeMAB_QA_Dashboard_Latest.pptx
@@ -6418,7 +6418,7 @@
                 <a:ea typeface="Segoe UI" charset="0"/>
                 <a:cs typeface="Segoe UI" charset="0"/>
               </a:rPr>
-              <a:t>12/24/2025 1:59:08 AM UTC</a:t>
+              <a:t>12/27/2025 12:31:47 AM UTC</a:t>
             </a:r>
           </a:p>
         </p:txBody>
@@ -6475,7 +6475,7 @@
                 <a:ea typeface="Segoe UI" charset="0"/>
                 <a:cs typeface="Segoe UI" charset="0"/>
               </a:rPr>
-              <a:t>12/24/2025 1:57:39 AM UTC</a:t>
+              <a:t>12/27/2025 12:29:46 AM UTC</a:t>
             </a:r>
             <a:endParaRPr lang="en-US" sz="900" b="0" i="0" dirty="0">
               <a:solidFill>
@@ -6588,7 +6588,7 @@
           <p:nvPr/>
         </p:nvPicPr>
         <p:blipFill>
-          <a:blip xmlns:r="http://schemas.openxmlformats.org/officeDocument/2006/relationships" xmlns:a="http://schemas.openxmlformats.org/drawingml/2006/main" r:embed="imgId44710881"/>
+          <a:blip xmlns:r="http://schemas.openxmlformats.org/officeDocument/2006/relationships" xmlns:a="http://schemas.openxmlformats.org/drawingml/2006/main" r:embed="imgId44788399"/>
           <a:stretch xmlns:a="http://schemas.openxmlformats.org/drawingml/2006/main">
             <a:fillRect/>
           </a:stretch>
@@ -6654,7 +6654,7 @@
           <p:nvPr/>
         </p:nvPicPr>
         <p:blipFill>
-          <a:blip xmlns:r="http://schemas.openxmlformats.org/officeDocument/2006/relationships" xmlns:a="http://schemas.openxmlformats.org/drawingml/2006/main" r:embed="imgId44710883"/>
+          <a:blip xmlns:r="http://schemas.openxmlformats.org/officeDocument/2006/relationships" xmlns:a="http://schemas.openxmlformats.org/drawingml/2006/main" r:embed="imgId44788401"/>
           <a:stretch xmlns:a="http://schemas.openxmlformats.org/drawingml/2006/main">
             <a:fillRect/>
           </a:stretch>
@@ -6720,7 +6720,7 @@
           <p:nvPr/>
         </p:nvPicPr>
         <p:blipFill>
-          <a:blip xmlns:r="http://schemas.openxmlformats.org/officeDocument/2006/relationships" xmlns:a="http://schemas.openxmlformats.org/drawingml/2006/main" r:embed="imgId44710884"/>
+          <a:blip xmlns:r="http://schemas.openxmlformats.org/officeDocument/2006/relationships" xmlns:a="http://schemas.openxmlformats.org/drawingml/2006/main" r:embed="imgId44788402"/>
           <a:stretch xmlns:a="http://schemas.openxmlformats.org/drawingml/2006/main">
             <a:fillRect/>
           </a:stretch>
@@ -6786,7 +6786,7 @@
           <p:nvPr/>
         </p:nvPicPr>
         <p:blipFill>
-          <a:blip xmlns:r="http://schemas.openxmlformats.org/officeDocument/2006/relationships" xmlns:a="http://schemas.openxmlformats.org/drawingml/2006/main" r:embed="imgId44710885"/>
+          <a:blip xmlns:r="http://schemas.openxmlformats.org/officeDocument/2006/relationships" xmlns:a="http://schemas.openxmlformats.org/drawingml/2006/main" r:embed="imgId44788403"/>
           <a:stretch xmlns:a="http://schemas.openxmlformats.org/drawingml/2006/main">
             <a:fillRect/>
           </a:stretch>
@@ -6852,7 +6852,7 @@
           <p:nvPr/>
         </p:nvPicPr>
         <p:blipFill>
-          <a:blip xmlns:r="http://schemas.openxmlformats.org/officeDocument/2006/relationships" xmlns:a="http://schemas.openxmlformats.org/drawingml/2006/main" r:embed="imgId44710886"/>
+          <a:blip xmlns:r="http://schemas.openxmlformats.org/officeDocument/2006/relationships" xmlns:a="http://schemas.openxmlformats.org/drawingml/2006/main" r:embed="imgId44788404"/>
           <a:stretch xmlns:a="http://schemas.openxmlformats.org/drawingml/2006/main">
             <a:fillRect/>
           </a:stretch>
@@ -6918,7 +6918,7 @@
           <p:nvPr/>
         </p:nvPicPr>
         <p:blipFill>
-          <a:blip xmlns:r="http://schemas.openxmlformats.org/officeDocument/2006/relationships" xmlns:a="http://schemas.openxmlformats.org/drawingml/2006/main" r:embed="imgId44710887"/>
+          <a:blip xmlns:r="http://schemas.openxmlformats.org/officeDocument/2006/relationships" xmlns:a="http://schemas.openxmlformats.org/drawingml/2006/main" r:embed="imgId44788405"/>
           <a:stretch xmlns:a="http://schemas.openxmlformats.org/drawingml/2006/main">
             <a:fillRect/>
           </a:stretch>
@@ -6984,7 +6984,7 @@
           <p:nvPr/>
         </p:nvPicPr>
         <p:blipFill>
-          <a:blip xmlns:r="http://schemas.openxmlformats.org/officeDocument/2006/relationships" xmlns:a="http://schemas.openxmlformats.org/drawingml/2006/main" r:embed="imgId44710888"/>
+          <a:blip xmlns:r="http://schemas.openxmlformats.org/officeDocument/2006/relationships" xmlns:a="http://schemas.openxmlformats.org/drawingml/2006/main" r:embed="imgId44788406"/>
           <a:stretch xmlns:a="http://schemas.openxmlformats.org/drawingml/2006/main">
             <a:fillRect/>
           </a:stretch>
@@ -7050,7 +7050,7 @@
           <p:nvPr/>
         </p:nvPicPr>
         <p:blipFill>
-          <a:blip xmlns:r="http://schemas.openxmlformats.org/officeDocument/2006/relationships" xmlns:a="http://schemas.openxmlformats.org/drawingml/2006/main" r:embed="imgId44710889"/>
+          <a:blip xmlns:r="http://schemas.openxmlformats.org/officeDocument/2006/relationships" xmlns:a="http://schemas.openxmlformats.org/drawingml/2006/main" r:embed="imgId44788407"/>
           <a:stretch xmlns:a="http://schemas.openxmlformats.org/drawingml/2006/main">
             <a:fillRect/>
           </a:stretch>
@@ -7116,7 +7116,7 @@
           <p:nvPr/>
         </p:nvPicPr>
         <p:blipFill>
-          <a:blip xmlns:r="http://schemas.openxmlformats.org/officeDocument/2006/relationships" xmlns:a="http://schemas.openxmlformats.org/drawingml/2006/main" r:embed="imgId44710890"/>
+          <a:blip xmlns:r="http://schemas.openxmlformats.org/officeDocument/2006/relationships" xmlns:a="http://schemas.openxmlformats.org/drawingml/2006/main" r:embed="imgId44788408"/>
           <a:stretch xmlns:a="http://schemas.openxmlformats.org/drawingml/2006/main">
             <a:fillRect/>
           </a:stretch>
@@ -7182,7 +7182,7 @@
           <p:nvPr/>
         </p:nvPicPr>
         <p:blipFill>
-          <a:blip xmlns:r="http://schemas.openxmlformats.org/officeDocument/2006/relationships" xmlns:a="http://schemas.openxmlformats.org/drawingml/2006/main" r:embed="imgId44710891"/>
+          <a:blip xmlns:r="http://schemas.openxmlformats.org/officeDocument/2006/relationships" xmlns:a="http://schemas.openxmlformats.org/drawingml/2006/main" r:embed="imgId44788409"/>
           <a:stretch xmlns:a="http://schemas.openxmlformats.org/drawingml/2006/main">
             <a:fillRect/>
           </a:stretch>

--- a/reports/PowerBI/HeMAB_QA_Dashboard_Latest.pptx
+++ b/reports/PowerBI/HeMAB_QA_Dashboard_Latest.pptx
@@ -6418,7 +6418,7 @@
                 <a:ea typeface="Segoe UI" charset="0"/>
                 <a:cs typeface="Segoe UI" charset="0"/>
               </a:rPr>
-              <a:t>12/27/2025 12:31:47 AM UTC</a:t>
+              <a:t>1/23/2026 12:19:43 PM UTC</a:t>
             </a:r>
           </a:p>
         </p:txBody>
@@ -6475,7 +6475,7 @@
                 <a:ea typeface="Segoe UI" charset="0"/>
                 <a:cs typeface="Segoe UI" charset="0"/>
               </a:rPr>
-              <a:t>12/27/2025 12:29:46 AM UTC</a:t>
+              <a:t>1/23/2026 12:17:45 PM UTC</a:t>
             </a:r>
             <a:endParaRPr lang="en-US" sz="900" b="0" i="0" dirty="0">
               <a:solidFill>
@@ -6588,7 +6588,7 @@
           <p:nvPr/>
         </p:nvPicPr>
         <p:blipFill>
-          <a:blip xmlns:r="http://schemas.openxmlformats.org/officeDocument/2006/relationships" xmlns:a="http://schemas.openxmlformats.org/drawingml/2006/main" r:embed="imgId44788399"/>
+          <a:blip xmlns:r="http://schemas.openxmlformats.org/officeDocument/2006/relationships" xmlns:a="http://schemas.openxmlformats.org/drawingml/2006/main" r:embed="imgId45917515"/>
           <a:stretch xmlns:a="http://schemas.openxmlformats.org/drawingml/2006/main">
             <a:fillRect/>
           </a:stretch>
@@ -6654,7 +6654,7 @@
           <p:nvPr/>
         </p:nvPicPr>
         <p:blipFill>
-          <a:blip xmlns:r="http://schemas.openxmlformats.org/officeDocument/2006/relationships" xmlns:a="http://schemas.openxmlformats.org/drawingml/2006/main" r:embed="imgId44788401"/>
+          <a:blip xmlns:r="http://schemas.openxmlformats.org/officeDocument/2006/relationships" xmlns:a="http://schemas.openxmlformats.org/drawingml/2006/main" r:embed="imgId45917517"/>
           <a:stretch xmlns:a="http://schemas.openxmlformats.org/drawingml/2006/main">
             <a:fillRect/>
           </a:stretch>
@@ -6720,7 +6720,7 @@
           <p:nvPr/>
         </p:nvPicPr>
         <p:blipFill>
-          <a:blip xmlns:r="http://schemas.openxmlformats.org/officeDocument/2006/relationships" xmlns:a="http://schemas.openxmlformats.org/drawingml/2006/main" r:embed="imgId44788402"/>
+          <a:blip xmlns:r="http://schemas.openxmlformats.org/officeDocument/2006/relationships" xmlns:a="http://schemas.openxmlformats.org/drawingml/2006/main" r:embed="imgId45917518"/>
           <a:stretch xmlns:a="http://schemas.openxmlformats.org/drawingml/2006/main">
             <a:fillRect/>
           </a:stretch>
@@ -6786,7 +6786,7 @@
           <p:nvPr/>
         </p:nvPicPr>
         <p:blipFill>
-          <a:blip xmlns:r="http://schemas.openxmlformats.org/officeDocument/2006/relationships" xmlns:a="http://schemas.openxmlformats.org/drawingml/2006/main" r:embed="imgId44788403"/>
+          <a:blip xmlns:r="http://schemas.openxmlformats.org/officeDocument/2006/relationships" xmlns:a="http://schemas.openxmlformats.org/drawingml/2006/main" r:embed="imgId45917519"/>
           <a:stretch xmlns:a="http://schemas.openxmlformats.org/drawingml/2006/main">
             <a:fillRect/>
           </a:stretch>
@@ -6852,7 +6852,7 @@
           <p:nvPr/>
         </p:nvPicPr>
         <p:blipFill>
-          <a:blip xmlns:r="http://schemas.openxmlformats.org/officeDocument/2006/relationships" xmlns:a="http://schemas.openxmlformats.org/drawingml/2006/main" r:embed="imgId44788404"/>
+          <a:blip xmlns:r="http://schemas.openxmlformats.org/officeDocument/2006/relationships" xmlns:a="http://schemas.openxmlformats.org/drawingml/2006/main" r:embed="imgId45917520"/>
           <a:stretch xmlns:a="http://schemas.openxmlformats.org/drawingml/2006/main">
             <a:fillRect/>
           </a:stretch>
@@ -6918,7 +6918,7 @@
           <p:nvPr/>
         </p:nvPicPr>
         <p:blipFill>
-          <a:blip xmlns:r="http://schemas.openxmlformats.org/officeDocument/2006/relationships" xmlns:a="http://schemas.openxmlformats.org/drawingml/2006/main" r:embed="imgId44788405"/>
+          <a:blip xmlns:r="http://schemas.openxmlformats.org/officeDocument/2006/relationships" xmlns:a="http://schemas.openxmlformats.org/drawingml/2006/main" r:embed="imgId45917521"/>
           <a:stretch xmlns:a="http://schemas.openxmlformats.org/drawingml/2006/main">
             <a:fillRect/>
           </a:stretch>
@@ -6984,7 +6984,7 @@
           <p:nvPr/>
         </p:nvPicPr>
         <p:blipFill>
-          <a:blip xmlns:r="http://schemas.openxmlformats.org/officeDocument/2006/relationships" xmlns:a="http://schemas.openxmlformats.org/drawingml/2006/main" r:embed="imgId44788406"/>
+          <a:blip xmlns:r="http://schemas.openxmlformats.org/officeDocument/2006/relationships" xmlns:a="http://schemas.openxmlformats.org/drawingml/2006/main" r:embed="imgId45917522"/>
           <a:stretch xmlns:a="http://schemas.openxmlformats.org/drawingml/2006/main">
             <a:fillRect/>
           </a:stretch>
@@ -7050,7 +7050,7 @@
           <p:nvPr/>
         </p:nvPicPr>
         <p:blipFill>
-          <a:blip xmlns:r="http://schemas.openxmlformats.org/officeDocument/2006/relationships" xmlns:a="http://schemas.openxmlformats.org/drawingml/2006/main" r:embed="imgId44788407"/>
+          <a:blip xmlns:r="http://schemas.openxmlformats.org/officeDocument/2006/relationships" xmlns:a="http://schemas.openxmlformats.org/drawingml/2006/main" r:embed="imgId45917523"/>
           <a:stretch xmlns:a="http://schemas.openxmlformats.org/drawingml/2006/main">
             <a:fillRect/>
           </a:stretch>
@@ -7116,7 +7116,7 @@
           <p:nvPr/>
         </p:nvPicPr>
         <p:blipFill>
-          <a:blip xmlns:r="http://schemas.openxmlformats.org/officeDocument/2006/relationships" xmlns:a="http://schemas.openxmlformats.org/drawingml/2006/main" r:embed="imgId44788408"/>
+          <a:blip xmlns:r="http://schemas.openxmlformats.org/officeDocument/2006/relationships" xmlns:a="http://schemas.openxmlformats.org/drawingml/2006/main" r:embed="imgId45917524"/>
           <a:stretch xmlns:a="http://schemas.openxmlformats.org/drawingml/2006/main">
             <a:fillRect/>
           </a:stretch>
@@ -7182,7 +7182,7 @@
           <p:nvPr/>
         </p:nvPicPr>
         <p:blipFill>
-          <a:blip xmlns:r="http://schemas.openxmlformats.org/officeDocument/2006/relationships" xmlns:a="http://schemas.openxmlformats.org/drawingml/2006/main" r:embed="imgId44788409"/>
+          <a:blip xmlns:r="http://schemas.openxmlformats.org/officeDocument/2006/relationships" xmlns:a="http://schemas.openxmlformats.org/drawingml/2006/main" r:embed="imgId45917525"/>
           <a:stretch xmlns:a="http://schemas.openxmlformats.org/drawingml/2006/main">
             <a:fillRect/>
           </a:stretch>

--- a/reports/PowerBI/HeMAB_QA_Dashboard_Latest.pptx
+++ b/reports/PowerBI/HeMAB_QA_Dashboard_Latest.pptx
@@ -6418,7 +6418,7 @@
                 <a:ea typeface="Segoe UI" charset="0"/>
                 <a:cs typeface="Segoe UI" charset="0"/>
               </a:rPr>
-              <a:t>1/23/2026 12:19:43 PM UTC</a:t>
+              <a:t>1/26/2026 4:59:14 PM UTC</a:t>
             </a:r>
           </a:p>
         </p:txBody>
@@ -6475,7 +6475,7 @@
                 <a:ea typeface="Segoe UI" charset="0"/>
                 <a:cs typeface="Segoe UI" charset="0"/>
               </a:rPr>
-              <a:t>1/23/2026 12:17:45 PM UTC</a:t>
+              <a:t>1/26/2026 4:57:48 PM UTC</a:t>
             </a:r>
             <a:endParaRPr lang="en-US" sz="900" b="0" i="0" dirty="0">
               <a:solidFill>
@@ -6588,7 +6588,7 @@
           <p:nvPr/>
         </p:nvPicPr>
         <p:blipFill>
-          <a:blip xmlns:r="http://schemas.openxmlformats.org/officeDocument/2006/relationships" xmlns:a="http://schemas.openxmlformats.org/drawingml/2006/main" r:embed="imgId45917515"/>
+          <a:blip xmlns:r="http://schemas.openxmlformats.org/officeDocument/2006/relationships" xmlns:a="http://schemas.openxmlformats.org/drawingml/2006/main" r:embed="imgId46037428"/>
           <a:stretch xmlns:a="http://schemas.openxmlformats.org/drawingml/2006/main">
             <a:fillRect/>
           </a:stretch>
@@ -6654,7 +6654,7 @@
           <p:nvPr/>
         </p:nvPicPr>
         <p:blipFill>
-          <a:blip xmlns:r="http://schemas.openxmlformats.org/officeDocument/2006/relationships" xmlns:a="http://schemas.openxmlformats.org/drawingml/2006/main" r:embed="imgId45917517"/>
+          <a:blip xmlns:r="http://schemas.openxmlformats.org/officeDocument/2006/relationships" xmlns:a="http://schemas.openxmlformats.org/drawingml/2006/main" r:embed="imgId46037430"/>
           <a:stretch xmlns:a="http://schemas.openxmlformats.org/drawingml/2006/main">
             <a:fillRect/>
           </a:stretch>
@@ -6720,7 +6720,7 @@
           <p:nvPr/>
         </p:nvPicPr>
         <p:blipFill>
-          <a:blip xmlns:r="http://schemas.openxmlformats.org/officeDocument/2006/relationships" xmlns:a="http://schemas.openxmlformats.org/drawingml/2006/main" r:embed="imgId45917518"/>
+          <a:blip xmlns:r="http://schemas.openxmlformats.org/officeDocument/2006/relationships" xmlns:a="http://schemas.openxmlformats.org/drawingml/2006/main" r:embed="imgId46037431"/>
           <a:stretch xmlns:a="http://schemas.openxmlformats.org/drawingml/2006/main">
             <a:fillRect/>
           </a:stretch>
@@ -6786,7 +6786,7 @@
           <p:nvPr/>
         </p:nvPicPr>
         <p:blipFill>
-          <a:blip xmlns:r="http://schemas.openxmlformats.org/officeDocument/2006/relationships" xmlns:a="http://schemas.openxmlformats.org/drawingml/2006/main" r:embed="imgId45917519"/>
+          <a:blip xmlns:r="http://schemas.openxmlformats.org/officeDocument/2006/relationships" xmlns:a="http://schemas.openxmlformats.org/drawingml/2006/main" r:embed="imgId46037432"/>
           <a:stretch xmlns:a="http://schemas.openxmlformats.org/drawingml/2006/main">
             <a:fillRect/>
           </a:stretch>
@@ -6852,7 +6852,7 @@
           <p:nvPr/>
         </p:nvPicPr>
         <p:blipFill>
-          <a:blip xmlns:r="http://schemas.openxmlformats.org/officeDocument/2006/relationships" xmlns:a="http://schemas.openxmlformats.org/drawingml/2006/main" r:embed="imgId45917520"/>
+          <a:blip xmlns:r="http://schemas.openxmlformats.org/officeDocument/2006/relationships" xmlns:a="http://schemas.openxmlformats.org/drawingml/2006/main" r:embed="imgId46037433"/>
           <a:stretch xmlns:a="http://schemas.openxmlformats.org/drawingml/2006/main">
             <a:fillRect/>
           </a:stretch>
@@ -6918,7 +6918,7 @@
           <p:nvPr/>
         </p:nvPicPr>
         <p:blipFill>
-          <a:blip xmlns:r="http://schemas.openxmlformats.org/officeDocument/2006/relationships" xmlns:a="http://schemas.openxmlformats.org/drawingml/2006/main" r:embed="imgId45917521"/>
+          <a:blip xmlns:r="http://schemas.openxmlformats.org/officeDocument/2006/relationships" xmlns:a="http://schemas.openxmlformats.org/drawingml/2006/main" r:embed="imgId46037434"/>
           <a:stretch xmlns:a="http://schemas.openxmlformats.org/drawingml/2006/main">
             <a:fillRect/>
           </a:stretch>
@@ -6984,7 +6984,7 @@
           <p:nvPr/>
         </p:nvPicPr>
         <p:blipFill>
-          <a:blip xmlns:r="http://schemas.openxmlformats.org/officeDocument/2006/relationships" xmlns:a="http://schemas.openxmlformats.org/drawingml/2006/main" r:embed="imgId45917522"/>
+          <a:blip xmlns:r="http://schemas.openxmlformats.org/officeDocument/2006/relationships" xmlns:a="http://schemas.openxmlformats.org/drawingml/2006/main" r:embed="imgId46037435"/>
           <a:stretch xmlns:a="http://schemas.openxmlformats.org/drawingml/2006/main">
             <a:fillRect/>
           </a:stretch>
@@ -7050,7 +7050,7 @@
           <p:nvPr/>
         </p:nvPicPr>
         <p:blipFill>
-          <a:blip xmlns:r="http://schemas.openxmlformats.org/officeDocument/2006/relationships" xmlns:a="http://schemas.openxmlformats.org/drawingml/2006/main" r:embed="imgId45917523"/>
+          <a:blip xmlns:r="http://schemas.openxmlformats.org/officeDocument/2006/relationships" xmlns:a="http://schemas.openxmlformats.org/drawingml/2006/main" r:embed="imgId46037436"/>
           <a:stretch xmlns:a="http://schemas.openxmlformats.org/drawingml/2006/main">
             <a:fillRect/>
           </a:stretch>
@@ -7116,7 +7116,7 @@
           <p:nvPr/>
         </p:nvPicPr>
         <p:blipFill>
-          <a:blip xmlns:r="http://schemas.openxmlformats.org/officeDocument/2006/relationships" xmlns:a="http://schemas.openxmlformats.org/drawingml/2006/main" r:embed="imgId45917524"/>
+          <a:blip xmlns:r="http://schemas.openxmlformats.org/officeDocument/2006/relationships" xmlns:a="http://schemas.openxmlformats.org/drawingml/2006/main" r:embed="imgId46037437"/>
           <a:stretch xmlns:a="http://schemas.openxmlformats.org/drawingml/2006/main">
             <a:fillRect/>
           </a:stretch>
@@ -7182,7 +7182,7 @@
           <p:nvPr/>
         </p:nvPicPr>
         <p:blipFill>
-          <a:blip xmlns:r="http://schemas.openxmlformats.org/officeDocument/2006/relationships" xmlns:a="http://schemas.openxmlformats.org/drawingml/2006/main" r:embed="imgId45917525"/>
+          <a:blip xmlns:r="http://schemas.openxmlformats.org/officeDocument/2006/relationships" xmlns:a="http://schemas.openxmlformats.org/drawingml/2006/main" r:embed="imgId46037438"/>
           <a:stretch xmlns:a="http://schemas.openxmlformats.org/drawingml/2006/main">
             <a:fillRect/>
           </a:stretch>

--- a/reports/PowerBI/HeMAB_QA_Dashboard_Latest.pptx
+++ b/reports/PowerBI/HeMAB_QA_Dashboard_Latest.pptx
@@ -6418,7 +6418,7 @@
                 <a:ea typeface="Segoe UI" charset="0"/>
                 <a:cs typeface="Segoe UI" charset="0"/>
               </a:rPr>
-              <a:t>1/26/2026 4:59:14 PM UTC</a:t>
+              <a:t>1/29/2026 10:43:08 AM UTC</a:t>
             </a:r>
           </a:p>
         </p:txBody>
@@ -6475,7 +6475,7 @@
                 <a:ea typeface="Segoe UI" charset="0"/>
                 <a:cs typeface="Segoe UI" charset="0"/>
               </a:rPr>
-              <a:t>1/26/2026 4:57:48 PM UTC</a:t>
+              <a:t>1/29/2026 10:41:52 AM UTC</a:t>
             </a:r>
             <a:endParaRPr lang="en-US" sz="900" b="0" i="0" dirty="0">
               <a:solidFill>
@@ -6588,7 +6588,7 @@
           <p:nvPr/>
         </p:nvPicPr>
         <p:blipFill>
-          <a:blip xmlns:r="http://schemas.openxmlformats.org/officeDocument/2006/relationships" xmlns:a="http://schemas.openxmlformats.org/drawingml/2006/main" r:embed="imgId46037428"/>
+          <a:blip xmlns:r="http://schemas.openxmlformats.org/officeDocument/2006/relationships" xmlns:a="http://schemas.openxmlformats.org/drawingml/2006/main" r:embed="imgId46197926"/>
           <a:stretch xmlns:a="http://schemas.openxmlformats.org/drawingml/2006/main">
             <a:fillRect/>
           </a:stretch>
@@ -6654,7 +6654,7 @@
           <p:nvPr/>
         </p:nvPicPr>
         <p:blipFill>
-          <a:blip xmlns:r="http://schemas.openxmlformats.org/officeDocument/2006/relationships" xmlns:a="http://schemas.openxmlformats.org/drawingml/2006/main" r:embed="imgId46037430"/>
+          <a:blip xmlns:r="http://schemas.openxmlformats.org/officeDocument/2006/relationships" xmlns:a="http://schemas.openxmlformats.org/drawingml/2006/main" r:embed="imgId46197928"/>
           <a:stretch xmlns:a="http://schemas.openxmlformats.org/drawingml/2006/main">
             <a:fillRect/>
           </a:stretch>
@@ -6720,7 +6720,7 @@
           <p:nvPr/>
         </p:nvPicPr>
         <p:blipFill>
-          <a:blip xmlns:r="http://schemas.openxmlformats.org/officeDocument/2006/relationships" xmlns:a="http://schemas.openxmlformats.org/drawingml/2006/main" r:embed="imgId46037431"/>
+          <a:blip xmlns:r="http://schemas.openxmlformats.org/officeDocument/2006/relationships" xmlns:a="http://schemas.openxmlformats.org/drawingml/2006/main" r:embed="imgId46197929"/>
           <a:stretch xmlns:a="http://schemas.openxmlformats.org/drawingml/2006/main">
             <a:fillRect/>
           </a:stretch>
@@ -6786,7 +6786,7 @@
           <p:nvPr/>
         </p:nvPicPr>
         <p:blipFill>
-          <a:blip xmlns:r="http://schemas.openxmlformats.org/officeDocument/2006/relationships" xmlns:a="http://schemas.openxmlformats.org/drawingml/2006/main" r:embed="imgId46037432"/>
+          <a:blip xmlns:r="http://schemas.openxmlformats.org/officeDocument/2006/relationships" xmlns:a="http://schemas.openxmlformats.org/drawingml/2006/main" r:embed="imgId46197930"/>
           <a:stretch xmlns:a="http://schemas.openxmlformats.org/drawingml/2006/main">
             <a:fillRect/>
           </a:stretch>
@@ -6852,7 +6852,7 @@
           <p:nvPr/>
         </p:nvPicPr>
         <p:blipFill>
-          <a:blip xmlns:r="http://schemas.openxmlformats.org/officeDocument/2006/relationships" xmlns:a="http://schemas.openxmlformats.org/drawingml/2006/main" r:embed="imgId46037433"/>
+          <a:blip xmlns:r="http://schemas.openxmlformats.org/officeDocument/2006/relationships" xmlns:a="http://schemas.openxmlformats.org/drawingml/2006/main" r:embed="imgId46197931"/>
           <a:stretch xmlns:a="http://schemas.openxmlformats.org/drawingml/2006/main">
             <a:fillRect/>
           </a:stretch>
@@ -6918,7 +6918,7 @@
           <p:nvPr/>
         </p:nvPicPr>
         <p:blipFill>
-          <a:blip xmlns:r="http://schemas.openxmlformats.org/officeDocument/2006/relationships" xmlns:a="http://schemas.openxmlformats.org/drawingml/2006/main" r:embed="imgId46037434"/>
+          <a:blip xmlns:r="http://schemas.openxmlformats.org/officeDocument/2006/relationships" xmlns:a="http://schemas.openxmlformats.org/drawingml/2006/main" r:embed="imgId46197932"/>
           <a:stretch xmlns:a="http://schemas.openxmlformats.org/drawingml/2006/main">
             <a:fillRect/>
           </a:stretch>
@@ -6984,7 +6984,7 @@
           <p:nvPr/>
         </p:nvPicPr>
         <p:blipFill>
-          <a:blip xmlns:r="http://schemas.openxmlformats.org/officeDocument/2006/relationships" xmlns:a="http://schemas.openxmlformats.org/drawingml/2006/main" r:embed="imgId46037435"/>
+          <a:blip xmlns:r="http://schemas.openxmlformats.org/officeDocument/2006/relationships" xmlns:a="http://schemas.openxmlformats.org/drawingml/2006/main" r:embed="imgId46197933"/>
           <a:stretch xmlns:a="http://schemas.openxmlformats.org/drawingml/2006/main">
             <a:fillRect/>
           </a:stretch>
@@ -7050,7 +7050,7 @@
           <p:nvPr/>
         </p:nvPicPr>
         <p:blipFill>
-          <a:blip xmlns:r="http://schemas.openxmlformats.org/officeDocument/2006/relationships" xmlns:a="http://schemas.openxmlformats.org/drawingml/2006/main" r:embed="imgId46037436"/>
+          <a:blip xmlns:r="http://schemas.openxmlformats.org/officeDocument/2006/relationships" xmlns:a="http://schemas.openxmlformats.org/drawingml/2006/main" r:embed="imgId46197934"/>
           <a:stretch xmlns:a="http://schemas.openxmlformats.org/drawingml/2006/main">
             <a:fillRect/>
           </a:stretch>
@@ -7116,7 +7116,7 @@
           <p:nvPr/>
         </p:nvPicPr>
         <p:blipFill>
-          <a:blip xmlns:r="http://schemas.openxmlformats.org/officeDocument/2006/relationships" xmlns:a="http://schemas.openxmlformats.org/drawingml/2006/main" r:embed="imgId46037437"/>
+          <a:blip xmlns:r="http://schemas.openxmlformats.org/officeDocument/2006/relationships" xmlns:a="http://schemas.openxmlformats.org/drawingml/2006/main" r:embed="imgId46197935"/>
           <a:stretch xmlns:a="http://schemas.openxmlformats.org/drawingml/2006/main">
             <a:fillRect/>
           </a:stretch>
@@ -7182,7 +7182,7 @@
           <p:nvPr/>
         </p:nvPicPr>
         <p:blipFill>
-          <a:blip xmlns:r="http://schemas.openxmlformats.org/officeDocument/2006/relationships" xmlns:a="http://schemas.openxmlformats.org/drawingml/2006/main" r:embed="imgId46037438"/>
+          <a:blip xmlns:r="http://schemas.openxmlformats.org/officeDocument/2006/relationships" xmlns:a="http://schemas.openxmlformats.org/drawingml/2006/main" r:embed="imgId46197936"/>
           <a:stretch xmlns:a="http://schemas.openxmlformats.org/drawingml/2006/main">
             <a:fillRect/>
           </a:stretch>
